--- a/_lectures/week01/speed_friending.pptx
+++ b/_lectures/week01/speed_friending.pptx
@@ -270,7 +270,7 @@
               <a:pPr>
                 <a:defRPr/>
               </a:pPr>
-              <a:t>7/7/2020</a:t>
+              <a:t>1/12/2026</a:t>
             </a:fld>
             <a:endParaRPr lang="en-US"/>
           </a:p>
@@ -488,7 +488,7 @@
             <a:fld id="{5E4F472A-94B4-4006-9179-F5769C00C5CE}" type="datetimeFigureOut">
               <a:rPr lang="en-US"/>
               <a:pPr/>
-              <a:t>7/7/2020</a:t>
+              <a:t>1/12/2026</a:t>
             </a:fld>
             <a:endParaRPr lang="en-US"/>
           </a:p>
@@ -864,17 +864,17 @@
           <a:lstStyle/>
           <a:p>
             <a:r>
-              <a:rPr lang="en-US" dirty="0" smtClean="0"/>
+              <a:rPr lang="en-US" dirty="0"/>
               <a:t>Question</a:t>
             </a:r>
             <a:r>
-              <a:rPr lang="en-US" baseline="0" dirty="0" smtClean="0"/>
+              <a:rPr lang="en-US" baseline="0" dirty="0"/>
               <a:t> list</a:t>
             </a:r>
           </a:p>
           <a:p>
             <a:r>
-              <a:rPr lang="en-US" baseline="0" dirty="0" smtClean="0"/>
+              <a:rPr lang="en-US" baseline="0" dirty="0"/>
               <a:t>https://docs.google.com/document/d/1B39r8Sj7hAQ5mfk1cUYdS2BbdeLpn6e9Jyeo1yz8vZQ/edit</a:t>
             </a:r>
             <a:endParaRPr lang="en-US" dirty="0"/>
@@ -963,17 +963,17 @@
           <a:lstStyle/>
           <a:p>
             <a:r>
-              <a:rPr lang="en-US" dirty="0" smtClean="0"/>
+              <a:rPr lang="en-US" dirty="0"/>
               <a:t>Question</a:t>
             </a:r>
             <a:r>
-              <a:rPr lang="en-US" baseline="0" dirty="0" smtClean="0"/>
+              <a:rPr lang="en-US" baseline="0" dirty="0"/>
               <a:t> list</a:t>
             </a:r>
           </a:p>
           <a:p>
             <a:r>
-              <a:rPr lang="en-US" baseline="0" dirty="0" smtClean="0"/>
+              <a:rPr lang="en-US" baseline="0" dirty="0"/>
               <a:t>https://docs.google.com/document/d/1B39r8Sj7hAQ5mfk1cUYdS2BbdeLpn6e9Jyeo1yz8vZQ/edit</a:t>
             </a:r>
             <a:endParaRPr lang="en-US" dirty="0"/>
@@ -1943,7 +1943,7 @@
               <a:pPr>
                 <a:defRPr/>
               </a:pPr>
-              <a:t>7/7/2020</a:t>
+              <a:t>1/12/2026</a:t>
             </a:fld>
             <a:endParaRPr lang="en-US"/>
           </a:p>
@@ -4271,7 +4271,7 @@
               <a:pPr>
                 <a:defRPr/>
               </a:pPr>
-              <a:t>7/7/2020</a:t>
+              <a:t>1/12/2026</a:t>
             </a:fld>
             <a:endParaRPr lang="en-US" dirty="0"/>
           </a:p>
@@ -4623,10 +4623,9 @@
           <a:lstStyle/>
           <a:p>
             <a:r>
-              <a:rPr lang="en-US" dirty="0" smtClean="0"/>
+              <a:rPr lang="en-US" dirty="0"/>
               <a:t>Speed Friending</a:t>
             </a:r>
-            <a:endParaRPr lang="en-US" dirty="0"/>
           </a:p>
         </p:txBody>
       </p:sp>
@@ -4643,75 +4642,47 @@
         <p:spPr/>
         <p:txBody>
           <a:bodyPr>
-            <a:normAutofit lnSpcReduction="10000"/>
+            <a:noAutofit/>
           </a:bodyPr>
           <a:lstStyle/>
           <a:p>
             <a:r>
-              <a:rPr lang="en-US" dirty="0" smtClean="0"/>
-              <a:t>You will be assigned to a breakout out room with tw</a:t>
-            </a:r>
-            <a:r>
-              <a:rPr lang="en-US" dirty="0" smtClean="0"/>
-              <a:t>o people</a:t>
-            </a:r>
-            <a:r>
-              <a:rPr lang="en-US" dirty="0" smtClean="0"/>
-              <a:t> </a:t>
-            </a:r>
-            <a:endParaRPr lang="en-US" dirty="0" smtClean="0"/>
-          </a:p>
-          <a:p>
-            <a:r>
-              <a:rPr lang="en-US" dirty="0" smtClean="0"/>
-              <a:t>2 </a:t>
-            </a:r>
-            <a:r>
-              <a:rPr lang="en-US" dirty="0" smtClean="0"/>
-              <a:t>minute timer</a:t>
+              <a:rPr lang="en-US" sz="2800" dirty="0"/>
+              <a:t>You will be assigned to a breakout out room with two people </a:t>
+            </a:r>
+          </a:p>
+          <a:p>
+            <a:r>
+              <a:rPr lang="en-US" sz="2800" dirty="0"/>
+              <a:t>2-minute timer</a:t>
             </a:r>
           </a:p>
           <a:p>
             <a:pPr lvl="1"/>
             <a:r>
-              <a:rPr lang="en-US" dirty="0" smtClean="0"/>
+              <a:rPr lang="en-US" sz="2400" dirty="0"/>
               <a:t>Introduce yourself</a:t>
             </a:r>
           </a:p>
           <a:p>
             <a:pPr lvl="1"/>
             <a:r>
-              <a:rPr lang="en-US" dirty="0" smtClean="0"/>
-              <a:t>Answer a question I </a:t>
-            </a:r>
-            <a:r>
-              <a:rPr lang="en-US" dirty="0" smtClean="0"/>
-              <a:t>pose</a:t>
-            </a:r>
-            <a:endParaRPr lang="en-US" dirty="0" smtClean="0"/>
+              <a:rPr lang="en-US" sz="2400" dirty="0"/>
+              <a:t>Answer a question I pose</a:t>
+            </a:r>
           </a:p>
           <a:p>
             <a:pPr lvl="1"/>
             <a:r>
-              <a:rPr lang="en-US" dirty="0" smtClean="0"/>
-              <a:t>When timer ends, </a:t>
-            </a:r>
-            <a:r>
-              <a:rPr lang="en-US" dirty="0" smtClean="0"/>
-              <a:t>you'll return to the classroom and be assigned to new group of students with a </a:t>
-            </a:r>
-            <a:r>
-              <a:rPr lang="en-US" smtClean="0"/>
-              <a:t>new question</a:t>
-            </a:r>
-            <a:endParaRPr lang="en-US" dirty="0" smtClean="0"/>
-          </a:p>
-          <a:p>
-            <a:r>
-              <a:rPr lang="en-US" dirty="0" smtClean="0"/>
-              <a:t>When we were are all done, share one interesting thing you learned about classmates</a:t>
-            </a:r>
-            <a:endParaRPr lang="en-US" dirty="0"/>
+              <a:rPr lang="en-US" sz="2400" dirty="0"/>
+              <a:t>When timer ends, you'll return to the classroom and be assigned to new group of students with a new question</a:t>
+            </a:r>
+          </a:p>
+          <a:p>
+            <a:r>
+              <a:rPr lang="en-US" sz="2800" dirty="0"/>
+              <a:t>When we are all done, share one interesting thing you learned about classmates</a:t>
+            </a:r>
           </a:p>
         </p:txBody>
       </p:sp>
@@ -4733,13 +4704,6 @@
       <p:transition/>
     </mc:Fallback>
   </mc:AlternateContent>
-  <p:timing>
-    <p:tnLst>
-      <p:par>
-        <p:cTn id="1" dur="indefinite" restart="never" nodeType="tmRoot"/>
-      </p:par>
-    </p:tnLst>
-  </p:timing>
 </p:sld>
 </file>
 
@@ -4776,10 +4740,9 @@
           <a:lstStyle/>
           <a:p>
             <a:r>
-              <a:rPr lang="en-US" dirty="0" smtClean="0"/>
+              <a:rPr lang="en-US" dirty="0"/>
               <a:t>Speed Friending</a:t>
             </a:r>
-            <a:endParaRPr lang="en-US" dirty="0"/>
           </a:p>
         </p:txBody>
       </p:sp>
@@ -4799,43 +4762,42 @@
           <a:lstStyle/>
           <a:p>
             <a:r>
-              <a:rPr lang="en-US" dirty="0" smtClean="0"/>
+              <a:rPr lang="en-US" dirty="0"/>
               <a:t>Get in two rows facing each other </a:t>
             </a:r>
           </a:p>
           <a:p>
             <a:r>
-              <a:rPr lang="en-US" dirty="0" smtClean="0"/>
+              <a:rPr lang="en-US" dirty="0"/>
               <a:t>1 minute timer</a:t>
             </a:r>
           </a:p>
           <a:p>
             <a:pPr lvl="1"/>
             <a:r>
-              <a:rPr lang="en-US" dirty="0" smtClean="0"/>
+              <a:rPr lang="en-US" dirty="0"/>
               <a:t>Introduce yourself</a:t>
             </a:r>
           </a:p>
           <a:p>
             <a:pPr lvl="1"/>
             <a:r>
-              <a:rPr lang="en-US" dirty="0" smtClean="0"/>
+              <a:rPr lang="en-US" dirty="0"/>
               <a:t>Answer a question I pose</a:t>
             </a:r>
           </a:p>
           <a:p>
             <a:pPr lvl="1"/>
             <a:r>
-              <a:rPr lang="en-US" dirty="0" smtClean="0"/>
+              <a:rPr lang="en-US" dirty="0"/>
               <a:t>When timer ends, students closest to back wall rotate one seat to left</a:t>
             </a:r>
           </a:p>
           <a:p>
             <a:r>
-              <a:rPr lang="en-US" dirty="0" smtClean="0"/>
-              <a:t>When we were are all done, share one interesting thing you learned about classmates</a:t>
-            </a:r>
-            <a:endParaRPr lang="en-US" dirty="0"/>
+              <a:rPr lang="en-US" dirty="0"/>
+              <a:t>When we are all done, share one interesting thing you learned about classmates</a:t>
+            </a:r>
           </a:p>
         </p:txBody>
       </p:sp>
@@ -4849,21 +4811,14 @@
   <p:clrMapOvr>
     <a:masterClrMapping/>
   </p:clrMapOvr>
-  <mc:AlternateContent xmlns:mc="http://schemas.openxmlformats.org/markup-compatibility/2006">
-    <mc:Choice xmlns:p14="http://schemas.microsoft.com/office/powerpoint/2010/main" Requires="p14">
+  <mc:AlternateContent xmlns:mc="http://schemas.openxmlformats.org/markup-compatibility/2006" xmlns:p14="http://schemas.microsoft.com/office/powerpoint/2010/main">
+    <mc:Choice Requires="p14">
       <p:transition p14:dur="0"/>
     </mc:Choice>
-    <mc:Fallback>
+    <mc:Fallback xmlns="">
       <p:transition/>
     </mc:Fallback>
   </mc:AlternateContent>
-  <p:timing>
-    <p:tnLst>
-      <p:par>
-        <p:cTn id="1" dur="indefinite" restart="never" nodeType="tmRoot"/>
-      </p:par>
-    </p:tnLst>
-  </p:timing>
 </p:sld>
 </file>
 
